--- a/doc/flowchart.pptx
+++ b/doc/flowchart.pptx
@@ -104,6 +104,11 @@
       </a:defRPr>
     </a:lvl9pPr>
   </p:defaultTextStyle>
+  <p:extLst>
+    <p:ext uri="{EFAFB233-063F-42B5-8137-9DF3F51BA10A}">
+      <p15:sldGuideLst xmlns:p15="http://schemas.microsoft.com/office/powerpoint/2012/main"/>
+    </p:ext>
+  </p:extLst>
 </p:presentation>
 </file>
 
@@ -254,7 +259,7 @@
           <a:p>
             <a:fld id="{8CD45574-4854-4465-BFCC-211F34F9E5C2}" type="datetimeFigureOut">
               <a:rPr lang="da-DK" smtClean="0"/>
-              <a:t>28-05-2026</a:t>
+              <a:t>12-06-2026</a:t>
             </a:fld>
             <a:endParaRPr lang="da-DK"/>
           </a:p>
@@ -452,7 +457,7 @@
           <a:p>
             <a:fld id="{8CD45574-4854-4465-BFCC-211F34F9E5C2}" type="datetimeFigureOut">
               <a:rPr lang="da-DK" smtClean="0"/>
-              <a:t>28-05-2026</a:t>
+              <a:t>12-06-2026</a:t>
             </a:fld>
             <a:endParaRPr lang="da-DK"/>
           </a:p>
@@ -660,7 +665,7 @@
           <a:p>
             <a:fld id="{8CD45574-4854-4465-BFCC-211F34F9E5C2}" type="datetimeFigureOut">
               <a:rPr lang="da-DK" smtClean="0"/>
-              <a:t>28-05-2026</a:t>
+              <a:t>12-06-2026</a:t>
             </a:fld>
             <a:endParaRPr lang="da-DK"/>
           </a:p>
@@ -858,7 +863,7 @@
           <a:p>
             <a:fld id="{8CD45574-4854-4465-BFCC-211F34F9E5C2}" type="datetimeFigureOut">
               <a:rPr lang="da-DK" smtClean="0"/>
-              <a:t>28-05-2026</a:t>
+              <a:t>12-06-2026</a:t>
             </a:fld>
             <a:endParaRPr lang="da-DK"/>
           </a:p>
@@ -1133,7 +1138,7 @@
           <a:p>
             <a:fld id="{8CD45574-4854-4465-BFCC-211F34F9E5C2}" type="datetimeFigureOut">
               <a:rPr lang="da-DK" smtClean="0"/>
-              <a:t>28-05-2026</a:t>
+              <a:t>12-06-2026</a:t>
             </a:fld>
             <a:endParaRPr lang="da-DK"/>
           </a:p>
@@ -1398,7 +1403,7 @@
           <a:p>
             <a:fld id="{8CD45574-4854-4465-BFCC-211F34F9E5C2}" type="datetimeFigureOut">
               <a:rPr lang="da-DK" smtClean="0"/>
-              <a:t>28-05-2026</a:t>
+              <a:t>12-06-2026</a:t>
             </a:fld>
             <a:endParaRPr lang="da-DK"/>
           </a:p>
@@ -1810,7 +1815,7 @@
           <a:p>
             <a:fld id="{8CD45574-4854-4465-BFCC-211F34F9E5C2}" type="datetimeFigureOut">
               <a:rPr lang="da-DK" smtClean="0"/>
-              <a:t>28-05-2026</a:t>
+              <a:t>12-06-2026</a:t>
             </a:fld>
             <a:endParaRPr lang="da-DK"/>
           </a:p>
@@ -1951,7 +1956,7 @@
           <a:p>
             <a:fld id="{8CD45574-4854-4465-BFCC-211F34F9E5C2}" type="datetimeFigureOut">
               <a:rPr lang="da-DK" smtClean="0"/>
-              <a:t>28-05-2026</a:t>
+              <a:t>12-06-2026</a:t>
             </a:fld>
             <a:endParaRPr lang="da-DK"/>
           </a:p>
@@ -2064,7 +2069,7 @@
           <a:p>
             <a:fld id="{8CD45574-4854-4465-BFCC-211F34F9E5C2}" type="datetimeFigureOut">
               <a:rPr lang="da-DK" smtClean="0"/>
-              <a:t>28-05-2026</a:t>
+              <a:t>12-06-2026</a:t>
             </a:fld>
             <a:endParaRPr lang="da-DK"/>
           </a:p>
@@ -2375,7 +2380,7 @@
           <a:p>
             <a:fld id="{8CD45574-4854-4465-BFCC-211F34F9E5C2}" type="datetimeFigureOut">
               <a:rPr lang="da-DK" smtClean="0"/>
-              <a:t>28-05-2026</a:t>
+              <a:t>12-06-2026</a:t>
             </a:fld>
             <a:endParaRPr lang="da-DK"/>
           </a:p>
@@ -2663,7 +2668,7 @@
           <a:p>
             <a:fld id="{8CD45574-4854-4465-BFCC-211F34F9E5C2}" type="datetimeFigureOut">
               <a:rPr lang="da-DK" smtClean="0"/>
-              <a:t>28-05-2026</a:t>
+              <a:t>12-06-2026</a:t>
             </a:fld>
             <a:endParaRPr lang="da-DK"/>
           </a:p>
@@ -2904,7 +2909,7 @@
           <a:p>
             <a:fld id="{8CD45574-4854-4465-BFCC-211F34F9E5C2}" type="datetimeFigureOut">
               <a:rPr lang="da-DK" smtClean="0"/>
-              <a:t>28-05-2026</a:t>
+              <a:t>12-06-2026</a:t>
             </a:fld>
             <a:endParaRPr lang="da-DK"/>
           </a:p>
@@ -3335,8 +3340,8 @@
         </p:nvSpPr>
         <p:spPr>
           <a:xfrm>
-            <a:off x="3017520" y="676656"/>
-            <a:ext cx="3584448" cy="758952"/>
+            <a:off x="3017520" y="448056"/>
+            <a:ext cx="3584448" cy="987552"/>
           </a:xfrm>
           <a:prstGeom prst="rect">
             <a:avLst/>
@@ -3370,7 +3375,14 @@
             <a:pPr algn="ctr"/>
             <a:r>
               <a:rPr lang="da-DK" sz="1400" dirty="0"/>
-              <a:t>Residens in Central Denmark Region, age 18-75 yr</a:t>
+              <a:t>People with T2D in Central Denmark Region, age 18-75 yr</a:t>
+            </a:r>
+            <a:br>
+              <a:rPr lang="da-DK" sz="1400" dirty="0"/>
+            </a:br>
+            <a:r>
+              <a:rPr lang="da-DK" sz="1400" dirty="0"/>
+              <a:t>n=72.343</a:t>
             </a:r>
           </a:p>
         </p:txBody>
@@ -3438,16 +3450,13 @@
               <a:rPr lang="da-DK" sz="1400" dirty="0" err="1"/>
               <a:t>distributed</a:t>
             </a:r>
+            <a:endParaRPr lang="da-DK" sz="1400" dirty="0"/>
+          </a:p>
+          <a:p>
+            <a:pPr algn="ctr"/>
             <a:r>
               <a:rPr lang="da-DK" sz="1400" dirty="0"/>
-              <a:t>,</a:t>
-            </a:r>
-          </a:p>
-          <a:p>
-            <a:pPr algn="ctr"/>
-            <a:r>
-              <a:rPr lang="da-DK" sz="1400" dirty="0"/>
-              <a:t>n = 136.229 </a:t>
+              <a:t>n = ?</a:t>
             </a:r>
           </a:p>
         </p:txBody>
@@ -3496,24 +3505,13 @@
               <a:rPr lang="da-DK" sz="1400" dirty="0" err="1"/>
               <a:t>Responders</a:t>
             </a:r>
+            <a:endParaRPr lang="da-DK" sz="1400" dirty="0"/>
+          </a:p>
+          <a:p>
+            <a:pPr algn="ctr"/>
             <a:r>
               <a:rPr lang="da-DK" sz="1400" dirty="0"/>
-              <a:t>, </a:t>
-            </a:r>
-            <a:r>
-              <a:rPr lang="da-DK" sz="1400" dirty="0" err="1"/>
-              <a:t>questionnaire</a:t>
-            </a:r>
-            <a:r>
-              <a:rPr lang="da-DK" sz="1400" dirty="0"/>
-              <a:t>,</a:t>
-            </a:r>
-          </a:p>
-          <a:p>
-            <a:pPr algn="ctr"/>
-            <a:r>
-              <a:rPr lang="da-DK" sz="1400" dirty="0"/>
-              <a:t>n = 56.730 (41,6%) </a:t>
+              <a:t>n = 20.830 (??%) </a:t>
             </a:r>
           </a:p>
         </p:txBody>
@@ -3559,6 +3557,41 @@
           <a:p>
             <a:pPr algn="ctr"/>
             <a:r>
+              <a:rPr lang="da-DK" sz="1400" b="1" dirty="0" err="1"/>
+              <a:t>Study</a:t>
+            </a:r>
+            <a:r>
+              <a:rPr lang="da-DK" sz="1400" b="1" dirty="0"/>
+              <a:t> </a:t>
+            </a:r>
+            <a:r>
+              <a:rPr lang="da-DK" sz="1400" b="1" dirty="0" err="1"/>
+              <a:t>group</a:t>
+            </a:r>
+            <a:r>
+              <a:rPr lang="da-DK" sz="1400" b="1" dirty="0"/>
+              <a:t> (W</a:t>
+            </a:r>
+            <a:r>
+              <a:rPr lang="da-DK" sz="1400" b="1"/>
+              <a:t>eightet</a:t>
+            </a:r>
+            <a:r>
+              <a:rPr lang="da-DK" sz="1400" b="1" dirty="0"/>
+              <a:t> </a:t>
+            </a:r>
+            <a:r>
+              <a:rPr lang="da-DK" sz="1400" b="1" dirty="0" err="1"/>
+              <a:t>analysis</a:t>
+            </a:r>
+            <a:r>
+              <a:rPr lang="da-DK" sz="1400" b="1" dirty="0"/>
+              <a:t>)</a:t>
+            </a:r>
+          </a:p>
+          <a:p>
+            <a:pPr algn="ctr"/>
+            <a:r>
               <a:rPr lang="da-DK" sz="1400" dirty="0" err="1"/>
               <a:t>Concent</a:t>
             </a:r>
@@ -3587,7 +3620,7 @@
             <a:pPr algn="ctr"/>
             <a:r>
               <a:rPr lang="da-DK" sz="1400" dirty="0"/>
-              <a:t>n = ____</a:t>
+              <a:t>n = 13.328</a:t>
             </a:r>
           </a:p>
         </p:txBody>
@@ -3644,7 +3677,26 @@
               <a:rPr lang="da-DK" sz="1400" b="1" dirty="0" err="1"/>
               <a:t>group</a:t>
             </a:r>
-            <a:endParaRPr lang="da-DK" sz="1400" b="1" dirty="0"/>
+            <a:r>
+              <a:rPr lang="da-DK" sz="1400" b="1" dirty="0"/>
+              <a:t> (</a:t>
+            </a:r>
+            <a:r>
+              <a:rPr lang="da-DK" sz="1400" b="1" dirty="0" err="1"/>
+              <a:t>Observed</a:t>
+            </a:r>
+            <a:r>
+              <a:rPr lang="da-DK" sz="1400" b="1" dirty="0"/>
+              <a:t> </a:t>
+            </a:r>
+            <a:r>
+              <a:rPr lang="da-DK" sz="1400" b="1" dirty="0" err="1"/>
+              <a:t>analysis</a:t>
+            </a:r>
+            <a:r>
+              <a:rPr lang="da-DK" sz="1400" b="1" dirty="0"/>
+              <a:t>)</a:t>
+            </a:r>
           </a:p>
           <a:p>
             <a:pPr algn="ctr"/>
